--- a/curriculum/M01/W03/L01/slides.pptx
+++ b/curriculum/M01/W03/L01/slides.pptx
@@ -4358,11 +4358,69 @@
                 <a:ea typeface="Malgun Gothic"/>
                 <a:cs typeface="Malgun Gothic"/>
               </a:rPr>
-              <a:t>. 2. 배반엽상층 세포가 원시선으로 이동해 아래로 들어간다(함입). 3. 가장 먼저 들어간 세포들이 배반엽하층을 밀어내고 그 자리를 차지해 </a:t>
-            </a:r>
+              <a:t>.</a:t>
+            </a:r>
+          </a:p>
+          <a:p>
+            <a:pPr>
+              <a:spcAft>
+                <a:spcPts val="900"/>
+              </a:spcAft>
+            </a:pPr>
             <a:r>
               <a:rPr sz="1400" b="1" i="0">
                 <a:solidFill>
+                  <a:srgbClr val="F2B705"/>
+                </a:solidFill>
+                <a:latin typeface="Malgun Gothic"/>
+                <a:ea typeface="Malgun Gothic"/>
+                <a:cs typeface="Malgun Gothic"/>
+              </a:rPr>
+              <a:t>•  </a:t>
+            </a:r>
+            <a:r>
+              <a:rPr sz="1400" b="0" i="0">
+                <a:solidFill>
+                  <a:srgbClr val="11202B"/>
+                </a:solidFill>
+                <a:latin typeface="Malgun Gothic"/>
+                <a:ea typeface="Malgun Gothic"/>
+                <a:cs typeface="Malgun Gothic"/>
+              </a:rPr>
+              <a:t>2. 배반엽상층 세포가 원시선으로 이동해 아래로 들어간다(함입).</a:t>
+            </a:r>
+          </a:p>
+          <a:p>
+            <a:pPr>
+              <a:spcAft>
+                <a:spcPts val="900"/>
+              </a:spcAft>
+            </a:pPr>
+            <a:r>
+              <a:rPr sz="1400" b="1" i="0">
+                <a:solidFill>
+                  <a:srgbClr val="F2B705"/>
+                </a:solidFill>
+                <a:latin typeface="Malgun Gothic"/>
+                <a:ea typeface="Malgun Gothic"/>
+                <a:cs typeface="Malgun Gothic"/>
+              </a:rPr>
+              <a:t>•  </a:t>
+            </a:r>
+            <a:r>
+              <a:rPr sz="1400" b="0" i="0">
+                <a:solidFill>
+                  <a:srgbClr val="11202B"/>
+                </a:solidFill>
+                <a:latin typeface="Malgun Gothic"/>
+                <a:ea typeface="Malgun Gothic"/>
+                <a:cs typeface="Malgun Gothic"/>
+              </a:rPr>
+              <a:t>3. 가장 먼저 들어간 세포들이 배반엽하층을 밀어내고 그 자리를 차지해 </a:t>
+            </a:r>
+            <a:r>
+              <a:rPr sz="1400" b="1" i="0">
+                <a:solidFill>
                   <a:srgbClr val="11202B"/>
                 </a:solidFill>
                 <a:latin typeface="Malgun Gothic"/>
@@ -4380,11 +4438,40 @@
                 <a:ea typeface="Malgun Gothic"/>
                 <a:cs typeface="Malgun Gothic"/>
               </a:rPr>
-              <a:t> 이 된다. 4. 뒤이어 들어간 세포들이 두 층 사이에 자리 잡아 </a:t>
-            </a:r>
+              <a:t> 이 된다.</a:t>
+            </a:r>
+          </a:p>
+          <a:p>
+            <a:pPr>
+              <a:spcAft>
+                <a:spcPts val="900"/>
+              </a:spcAft>
+            </a:pPr>
             <a:r>
               <a:rPr sz="1400" b="1" i="0">
                 <a:solidFill>
+                  <a:srgbClr val="F2B705"/>
+                </a:solidFill>
+                <a:latin typeface="Malgun Gothic"/>
+                <a:ea typeface="Malgun Gothic"/>
+                <a:cs typeface="Malgun Gothic"/>
+              </a:rPr>
+              <a:t>•  </a:t>
+            </a:r>
+            <a:r>
+              <a:rPr sz="1400" b="0" i="0">
+                <a:solidFill>
+                  <a:srgbClr val="11202B"/>
+                </a:solidFill>
+                <a:latin typeface="Malgun Gothic"/>
+                <a:ea typeface="Malgun Gothic"/>
+                <a:cs typeface="Malgun Gothic"/>
+              </a:rPr>
+              <a:t>4. 뒤이어 들어간 세포들이 두 층 사이에 자리 잡아 </a:t>
+            </a:r>
+            <a:r>
+              <a:rPr sz="1400" b="1" i="0">
+                <a:solidFill>
                   <a:srgbClr val="11202B"/>
                 </a:solidFill>
                 <a:latin typeface="Malgun Gothic"/>
@@ -4402,7 +4489,36 @@
                 <a:ea typeface="Malgun Gothic"/>
                 <a:cs typeface="Malgun Gothic"/>
               </a:rPr>
-              <a:t> 이 된다. 5. 들어가지 않고 표면에 남은 세포들이 </a:t>
+              <a:t> 이 된다.</a:t>
+            </a:r>
+          </a:p>
+          <a:p>
+            <a:pPr>
+              <a:spcAft>
+                <a:spcPts val="900"/>
+              </a:spcAft>
+            </a:pPr>
+            <a:r>
+              <a:rPr sz="1400" b="1" i="0">
+                <a:solidFill>
+                  <a:srgbClr val="F2B705"/>
+                </a:solidFill>
+                <a:latin typeface="Malgun Gothic"/>
+                <a:ea typeface="Malgun Gothic"/>
+                <a:cs typeface="Malgun Gothic"/>
+              </a:rPr>
+              <a:t>•  </a:t>
+            </a:r>
+            <a:r>
+              <a:rPr sz="1400" b="0" i="0">
+                <a:solidFill>
+                  <a:srgbClr val="11202B"/>
+                </a:solidFill>
+                <a:latin typeface="Malgun Gothic"/>
+                <a:ea typeface="Malgun Gothic"/>
+                <a:cs typeface="Malgun Gothic"/>
+              </a:rPr>
+              <a:t>5. 들어가지 않고 표면에 남은 세포들이 </a:t>
             </a:r>
             <a:r>
               <a:rPr sz="1400" b="1" i="0">

--- a/curriculum/M01/W03/L01/slides.pptx
+++ b/curriculum/M01/W03/L01/slides.pptx
@@ -13673,7 +13673,7 @@
                 <a:ea typeface="Malgun Gothic"/>
                 <a:cs typeface="Malgun Gothic"/>
               </a:rPr>
-              <a:t>M01-W02-L03 생식계 요약 — 수정, 착상, 태반의 형성</a:t>
+              <a:t>M01-W02-L03 생식계 요약: 생식기관·생식세포·호르몬 — 수정, 착상, 태반의 형성</a:t>
             </a:r>
           </a:p>
           <a:p>
@@ -13702,7 +13702,7 @@
                 <a:ea typeface="Malgun Gothic"/>
                 <a:cs typeface="Malgun Gothic"/>
               </a:rPr>
-              <a:t>M01-W05-L03 유전정보의 흐름 — 전사와 번역의 기본</a:t>
+              <a:t>M01-W05-L03 유전정보의 흐름: 복제·전사·번역 — 전사와 번역의 기본</a:t>
             </a:r>
           </a:p>
           <a:p>
@@ -13731,7 +13731,7 @@
                 <a:ea typeface="Malgun Gothic"/>
                 <a:cs typeface="Malgun Gothic"/>
               </a:rPr>
-              <a:t>M01-W11-L02 세포 신호전달 — 수용체와 2차 전령의 기본 구조</a:t>
+              <a:t>M01-W11-L02 세포 신호전달: 수용체와 2차 전령 — 수용체와 2차 전령의 기본 구조</a:t>
             </a:r>
           </a:p>
         </p:txBody>
